--- a/dist/초1/국어/말과글/초1_국어_말과글_03_그림일기쓰기_학생용.pptx
+++ b/dist/초1/국어/말과글/초1_국어_말과글_03_그림일기쓰기_학생용.pptx
@@ -119,13 +119,13 @@
   <p:extLst>
     <p:ext uri="{521415D9-36F7-43E2-AB2F-B90AF26B5E84}">
       <p14:sectionLst xmlns:p14="http://schemas.microsoft.com/office/powerpoint/2010/main">
-        <p14:section name="도입" id="{667709cc-46d1-f04f-97a2-bb521023d39e}">
+        <p14:section name="도입" id="{138f6a9b-b846-3a4f-b0c9-cab3fbdf5295}">
           <p14:sldIdLst>
             <p14:sldId id="256"/>
             <p14:sldId id="257"/>
           </p14:sldIdLst>
         </p14:section>
-        <p14:section name="개념" id="{a56f9556-9793-5398-1bd9-78020105ede9}">
+        <p14:section name="개념" id="{0e5158b4-7860-212c-eb47-ef863b321c2f}">
           <p14:sldIdLst>
             <p14:sldId id="258"/>
             <p14:sldId id="259"/>
@@ -134,24 +134,24 @@
             <p14:sldId id="262"/>
           </p14:sldIdLst>
         </p14:section>
-        <p14:section name="연습" id="{c9658aa8-a5e3-a976-3947-8b82ef37d47f}">
+        <p14:section name="연습" id="{932926f0-45a5-e8f3-9b0d-83c1792a92ad}">
           <p14:sldIdLst>
             <p14:sldId id="263"/>
             <p14:sldId id="264"/>
           </p14:sldIdLst>
         </p14:section>
-        <p14:section name="확인" id="{f1eb5dd8-a93f-b90f-632f-3c1063125a09}">
+        <p14:section name="확인" id="{f774f1ac-d9f7-0913-9cf2-b93c0ea69949}">
           <p14:sldIdLst>
             <p14:sldId id="265"/>
             <p14:sldId id="266"/>
           </p14:sldIdLst>
         </p14:section>
-        <p14:section name="정리" id="{f4a0d697-85fa-346e-7fa8-aef16c109b90}">
+        <p14:section name="정리" id="{3ef2494f-6448-a0ea-7f26-e4ab02b7a00f}">
           <p14:sldIdLst>
             <p14:sldId id="267"/>
           </p14:sldIdLst>
         </p14:section>
-        <p14:section name="보충" id="{01269e7e-eadf-875a-8c7d-ba7860405678}">
+        <p14:section name="보충" id="{a19c8ef1-dd53-c9ed-3d7f-2f66f76ff01e}">
           <p14:sldIdLst>
             <p14:sldId id="268"/>
           </p14:sldIdLst>

--- a/dist/초1/국어/말과글/초1_국어_말과글_03_그림일기쓰기_학생용.pptx
+++ b/dist/초1/국어/말과글/초1_국어_말과글_03_그림일기쓰기_학생용.pptx
@@ -119,13 +119,13 @@
   <p:extLst>
     <p:ext uri="{521415D9-36F7-43E2-AB2F-B90AF26B5E84}">
       <p14:sectionLst xmlns:p14="http://schemas.microsoft.com/office/powerpoint/2010/main">
-        <p14:section name="도입" id="{138f6a9b-b846-3a4f-b0c9-cab3fbdf5295}">
+        <p14:section name="도입" id="{e450d1f2-30fe-d894-69db-7af00876787c}">
           <p14:sldIdLst>
             <p14:sldId id="256"/>
             <p14:sldId id="257"/>
           </p14:sldIdLst>
         </p14:section>
-        <p14:section name="개념" id="{0e5158b4-7860-212c-eb47-ef863b321c2f}">
+        <p14:section name="개념" id="{17de5fec-cf9b-7c8a-7533-00268800b5f1}">
           <p14:sldIdLst>
             <p14:sldId id="258"/>
             <p14:sldId id="259"/>
@@ -134,24 +134,24 @@
             <p14:sldId id="262"/>
           </p14:sldIdLst>
         </p14:section>
-        <p14:section name="연습" id="{932926f0-45a5-e8f3-9b0d-83c1792a92ad}">
+        <p14:section name="연습" id="{1d9161a1-c194-6ca3-b980-c53b64f6aa42}">
           <p14:sldIdLst>
             <p14:sldId id="263"/>
             <p14:sldId id="264"/>
           </p14:sldIdLst>
         </p14:section>
-        <p14:section name="확인" id="{f774f1ac-d9f7-0913-9cf2-b93c0ea69949}">
+        <p14:section name="확인" id="{2790e61f-3f9b-a8a6-f4a0-7d191057b368}">
           <p14:sldIdLst>
             <p14:sldId id="265"/>
             <p14:sldId id="266"/>
           </p14:sldIdLst>
         </p14:section>
-        <p14:section name="정리" id="{3ef2494f-6448-a0ea-7f26-e4ab02b7a00f}">
+        <p14:section name="정리" id="{50c4a557-f0cc-98f5-c114-a0abcd7dd312}">
           <p14:sldIdLst>
             <p14:sldId id="267"/>
           </p14:sldIdLst>
         </p14:section>
-        <p14:section name="보충" id="{a19c8ef1-dd53-c9ed-3d7f-2f66f76ff01e}">
+        <p14:section name="보충" id="{88d21dc3-a057-c423-4ed2-3d71023178bb}">
           <p14:sldIdLst>
             <p14:sldId id="268"/>
           </p14:sldIdLst>
